--- a/docs/FactoryPulse_Submission_Deck.pptx
+++ b/docs/FactoryPulse_Submission_Deck.pptx
@@ -9162,7 +9162,7 @@
                 <a:cs typeface="Manrope SemiBold"/>
                 <a:sym typeface="Manrope SemiBold"/>
               </a:rPr>
-              <a:t>&lt;Team name&gt;</a:t>
+              <a:t>ICE</a:t>
             </a:r>
             <a:endParaRPr b="0" i="0" sz="1343" u="none" cap="none" strike="noStrike">
               <a:solidFill>
@@ -9318,7 +9318,7 @@
                 <a:cs typeface="Manrope SemiBold"/>
                 <a:sym typeface="Manrope SemiBold"/>
               </a:rPr>
-              <a:t>&lt;Team leader name&gt;</a:t>
+              <a:t>Amogh Kotha Nagaraj</a:t>
             </a:r>
             <a:endParaRPr b="0" i="0" sz="1343" u="none" cap="none" strike="noStrike">
               <a:solidFill>

--- a/docs/FactoryPulse_Submission_Deck.pptx
+++ b/docs/FactoryPulse_Submission_Deck.pptx
@@ -9396,7 +9396,7 @@
                 <a:cs typeface="Manrope SemiBold"/>
                 <a:sym typeface="Manrope SemiBold"/>
               </a:rPr>
-              <a:t>&lt;N&gt;</a:t>
+              <a:t>1</a:t>
             </a:r>
             <a:endParaRPr b="0" i="0" sz="1343" u="none" cap="none" strike="noStrike">
               <a:solidFill>
